--- a/docs/pptx/Ch5_SUPPLEMENT.pptx
+++ b/docs/pptx/Ch5_SUPPLEMENT.pptx
@@ -503,10 +503,18 @@
           <a:lstStyle/>
           <a:p>
             <a:r>
-              <a:rPr lang="en-US" dirty="0"/>
-              <a:t/>
-            </a:r>
-            <a:endParaRPr lang="en-US" dirty="0"/>
+              <a:t>PROF: Exercice guidé — faire spécifier un ADT Queue par les étudiants.</a:t>
+            </a:r>
+          </a:p>
+          <a:p>
+            <a:r>
+              <a:t>Étapes : 1) Identifier les opérations 2) Écrire les PRE/POST 3) Définir les invariants.</a:t>
+            </a:r>
+          </a:p>
+          <a:p>
+            <a:r>
+              <a:t>Durée : 20 min individuel + 10 min correction collective.</a:t>
+            </a:r>
           </a:p>
         </p:txBody>
       </p:sp>
@@ -591,10 +599,18 @@
           <a:lstStyle/>
           <a:p>
             <a:r>
-              <a:rPr lang="en-US" dirty="0"/>
-              <a:t/>
-            </a:r>
-            <a:endParaRPr lang="en-US" dirty="0"/>
+              <a:t>PROF: Questions de réflexion à discuter en groupe.</a:t>
+            </a:r>
+          </a:p>
+          <a:p>
+            <a:r>
+              <a:t>Objectif : vérifier la compréhension profonde, pas juste la mémorisation.</a:t>
+            </a:r>
+          </a:p>
+          <a:p>
+            <a:r>
+              <a:t>Laisser 5 min de réflexion puis tour de table.</a:t>
+            </a:r>
           </a:p>
         </p:txBody>
       </p:sp>
@@ -679,10 +695,13 @@
           <a:lstStyle/>
           <a:p>
             <a:r>
-              <a:rPr lang="en-US" dirty="0"/>
-              <a:t/>
-            </a:r>
-            <a:endParaRPr lang="en-US" dirty="0"/>
+              <a:t>PROF: Récap à projeter en fin de cours.</a:t>
+            </a:r>
+          </a:p>
+          <a:p>
+            <a:r>
+              <a:t>Demander aux étudiants de fermer leurs notes et de réciter les mots-clés de mémoire.</a:t>
+            </a:r>
           </a:p>
         </p:txBody>
       </p:sp>
